--- a/Week-1/Day-2/Prompt_Engineering_for_Data_Engineers.pptx
+++ b/Week-1/Day-2/Prompt_Engineering_for_Data_Engineers.pptx
@@ -39102,8 +39102,8 @@
           <a:lstStyle/>
           <a:p>
             <a:r>
-              <a:rPr lang="en-US" dirty="0" err="1"/>
-              <a:t>FraMeWorks</a:t>
+              <a:rPr lang="en-US" dirty="0"/>
+              <a:t>Framework's</a:t>
             </a:r>
             <a:endParaRPr lang="en-IN" dirty="0"/>
           </a:p>
